--- a/docs/minor_project/OpenCAI Progress PPT - Mid Term Evaluation.pptx
+++ b/docs/minor_project/OpenCAI Progress PPT - Mid Term Evaluation.pptx
@@ -9494,7 +9494,7 @@
             </a:r>
             <a:r>
               <a:rPr lang="en-IN" altLang="en-US" sz="1600"/>
-              <a:t> restrict sandbox network egress and enforce the per-session spend ceiling.</a:t>
+              <a:t> add an AI agent to the command policy that detects commands which change resources, restrict sandbox network egress and enforce the per-session spend ceiling.</a:t>
             </a:r>
           </a:p>
           <a:p>
